--- a/chapter6/parts/part-05-multivariate-visualization/clip.pptx
+++ b/chapter6/parts/part-05-multivariate-visualization/clip.pptx
@@ -4171,7 +4171,7 @@
               </a:defRPr>
             </a:pPr>
             <a:r>
-              <a:t>Chapter 6 — 05 Multivariate Visualization</a:t>
+              <a:t>Chapter 6 — Multivariate Visualization</a:t>
             </a:r>
           </a:p>
         </p:txBody>
@@ -4330,7 +4330,7 @@
               </a:defRPr>
             </a:pPr>
             <a:r>
-              <a:t>Chapter 6 — 05 Multivariate Visualization</a:t>
+              <a:t>Chapter 6 — Multivariate Visualization</a:t>
             </a:r>
           </a:p>
         </p:txBody>
@@ -4489,7 +4489,7 @@
               </a:defRPr>
             </a:pPr>
             <a:r>
-              <a:t>Chapter 6 — 05 Multivariate Visualization</a:t>
+              <a:t>Chapter 6 — Multivariate Visualization</a:t>
             </a:r>
           </a:p>
         </p:txBody>
@@ -4648,7 +4648,7 @@
               </a:defRPr>
             </a:pPr>
             <a:r>
-              <a:t>Chapter 6 — 05 Multivariate Visualization</a:t>
+              <a:t>Chapter 6 — Multivariate Visualization</a:t>
             </a:r>
           </a:p>
         </p:txBody>
@@ -4827,7 +4827,7 @@
               </a:defRPr>
             </a:pPr>
             <a:r>
-              <a:t>Chapter 6 — 05 Multivariate Visualization</a:t>
+              <a:t>Chapter 6 — Multivariate Visualization</a:t>
             </a:r>
           </a:p>
         </p:txBody>
@@ -4986,7 +4986,7 @@
               </a:defRPr>
             </a:pPr>
             <a:r>
-              <a:t>Chapter 6 — 05 Multivariate Visualization</a:t>
+              <a:t>Chapter 6 — Multivariate Visualization</a:t>
             </a:r>
           </a:p>
         </p:txBody>
@@ -5185,7 +5185,7 @@
               </a:defRPr>
             </a:pPr>
             <a:r>
-              <a:t>Chapter 6 — 05 Multivariate Visualization</a:t>
+              <a:t>Chapter 6 — Multivariate Visualization</a:t>
             </a:r>
           </a:p>
         </p:txBody>
@@ -5364,7 +5364,7 @@
               </a:defRPr>
             </a:pPr>
             <a:r>
-              <a:t>Chapter 6 — 05 Multivariate Visualization</a:t>
+              <a:t>Chapter 6 — Multivariate Visualization</a:t>
             </a:r>
           </a:p>
         </p:txBody>
@@ -5523,7 +5523,7 @@
               </a:defRPr>
             </a:pPr>
             <a:r>
-              <a:t>Chapter 6 — 05 Multivariate Visualization</a:t>
+              <a:t>Chapter 6 — Multivariate Visualization</a:t>
             </a:r>
           </a:p>
         </p:txBody>

--- a/chapter6/parts/part-05-multivariate-visualization/clip.pptx
+++ b/chapter6/parts/part-05-multivariate-visualization/clip.pptx
@@ -4255,10 +4255,12 @@
           </a:bodyPr>
           <a:lstStyle/>
           <a:p>
-            <a:pPr>
+            <a:pPr lvl="0" marL="457200" indent="-228600">
+              <a:buFont typeface="Calibri"/>
               <a:spcAft>
                 <a:spcPts val="1000"/>
               </a:spcAft>
+              <a:buSzPct val="100000"/>
               <a:buChar char="•"/>
               <a:lnSpc>
                 <a:spcPts val="2200"/>
@@ -4275,10 +4277,12 @@
             </a:r>
           </a:p>
           <a:p>
-            <a:pPr>
+            <a:pPr lvl="0" marL="457200" indent="-228600">
+              <a:buFont typeface="Calibri"/>
               <a:spcAft>
                 <a:spcPts val="1000"/>
               </a:spcAft>
+              <a:buSzPct val="100000"/>
               <a:buChar char="•"/>
               <a:lnSpc>
                 <a:spcPts val="2200"/>
@@ -4414,10 +4418,12 @@
           </a:bodyPr>
           <a:lstStyle/>
           <a:p>
-            <a:pPr>
+            <a:pPr lvl="0" marL="457200" indent="-228600">
+              <a:buFont typeface="Calibri"/>
               <a:spcAft>
                 <a:spcPts val="1000"/>
               </a:spcAft>
+              <a:buSzPct val="100000"/>
               <a:buChar char="•"/>
               <a:lnSpc>
                 <a:spcPts val="2200"/>
@@ -4434,10 +4440,12 @@
             </a:r>
           </a:p>
           <a:p>
-            <a:pPr>
+            <a:pPr lvl="0" marL="457200" indent="-228600">
+              <a:buFont typeface="Calibri"/>
               <a:spcAft>
                 <a:spcPts val="1000"/>
               </a:spcAft>
+              <a:buSzPct val="100000"/>
               <a:buChar char="•"/>
               <a:lnSpc>
                 <a:spcPts val="2200"/>
@@ -4573,10 +4581,12 @@
           </a:bodyPr>
           <a:lstStyle/>
           <a:p>
-            <a:pPr>
+            <a:pPr lvl="0" marL="457200" indent="-228600">
+              <a:buFont typeface="Calibri"/>
               <a:spcAft>
                 <a:spcPts val="1000"/>
               </a:spcAft>
+              <a:buSzPct val="100000"/>
               <a:buChar char="•"/>
               <a:lnSpc>
                 <a:spcPts val="2200"/>
@@ -4593,10 +4603,12 @@
             </a:r>
           </a:p>
           <a:p>
-            <a:pPr>
+            <a:pPr lvl="0" marL="457200" indent="-228600">
+              <a:buFont typeface="Calibri"/>
               <a:spcAft>
                 <a:spcPts val="1000"/>
               </a:spcAft>
+              <a:buSzPct val="100000"/>
               <a:buChar char="•"/>
               <a:lnSpc>
                 <a:spcPts val="2200"/>
@@ -4732,10 +4744,12 @@
           </a:bodyPr>
           <a:lstStyle/>
           <a:p>
-            <a:pPr>
+            <a:pPr lvl="0" marL="457200" indent="-228600">
+              <a:buFont typeface="Calibri"/>
               <a:spcAft>
                 <a:spcPts val="1000"/>
               </a:spcAft>
+              <a:buSzPct val="100000"/>
               <a:buChar char="•"/>
               <a:lnSpc>
                 <a:spcPts val="2200"/>
@@ -4752,10 +4766,12 @@
             </a:r>
           </a:p>
           <a:p>
-            <a:pPr>
+            <a:pPr lvl="0" marL="457200" indent="-228600">
+              <a:buFont typeface="Calibri"/>
               <a:spcAft>
                 <a:spcPts val="1000"/>
               </a:spcAft>
+              <a:buSzPct val="100000"/>
               <a:buChar char="•"/>
               <a:lnSpc>
                 <a:spcPts val="2200"/>
@@ -4772,10 +4788,12 @@
             </a:r>
           </a:p>
           <a:p>
-            <a:pPr>
+            <a:pPr lvl="0" marL="457200" indent="-228600">
+              <a:buFont typeface="Calibri"/>
               <a:spcAft>
                 <a:spcPts val="1000"/>
               </a:spcAft>
+              <a:buSzPct val="100000"/>
               <a:buChar char="•"/>
               <a:lnSpc>
                 <a:spcPts val="2200"/>
@@ -4911,10 +4929,12 @@
           </a:bodyPr>
           <a:lstStyle/>
           <a:p>
-            <a:pPr>
+            <a:pPr lvl="0" marL="457200" indent="-228600">
+              <a:buFont typeface="Calibri"/>
               <a:spcAft>
                 <a:spcPts val="1000"/>
               </a:spcAft>
+              <a:buSzPct val="100000"/>
               <a:buChar char="•"/>
               <a:lnSpc>
                 <a:spcPts val="2200"/>
@@ -4931,10 +4951,12 @@
             </a:r>
           </a:p>
           <a:p>
-            <a:pPr>
+            <a:pPr lvl="0" marL="457200" indent="-228600">
+              <a:buFont typeface="Calibri"/>
               <a:spcAft>
                 <a:spcPts val="1000"/>
               </a:spcAft>
+              <a:buSzPct val="100000"/>
               <a:buChar char="•"/>
               <a:lnSpc>
                 <a:spcPts val="2200"/>
@@ -5070,10 +5092,12 @@
           </a:bodyPr>
           <a:lstStyle/>
           <a:p>
-            <a:pPr>
+            <a:pPr lvl="0" marL="457200" indent="-228600">
+              <a:buFont typeface="Calibri"/>
               <a:spcAft>
                 <a:spcPts val="1000"/>
               </a:spcAft>
+              <a:buSzPct val="100000"/>
               <a:buChar char="•"/>
               <a:lnSpc>
                 <a:spcPts val="2200"/>
@@ -5090,10 +5114,12 @@
             </a:r>
           </a:p>
           <a:p>
-            <a:pPr>
+            <a:pPr lvl="0" marL="457200" indent="-228600">
+              <a:buFont typeface="Calibri"/>
               <a:spcAft>
                 <a:spcPts val="1000"/>
               </a:spcAft>
+              <a:buSzPct val="100000"/>
               <a:buChar char="•"/>
               <a:lnSpc>
                 <a:spcPts val="2200"/>
@@ -5110,10 +5136,12 @@
             </a:r>
           </a:p>
           <a:p>
-            <a:pPr>
+            <a:pPr lvl="0" marL="457200" indent="-228600">
+              <a:buFont typeface="Calibri"/>
               <a:spcAft>
                 <a:spcPts val="1000"/>
               </a:spcAft>
+              <a:buSzPct val="100000"/>
               <a:buChar char="•"/>
               <a:lnSpc>
                 <a:spcPts val="2200"/>
@@ -5130,10 +5158,12 @@
             </a:r>
           </a:p>
           <a:p>
-            <a:pPr>
+            <a:pPr lvl="0" marL="457200" indent="-228600">
+              <a:buFont typeface="Calibri"/>
               <a:spcAft>
                 <a:spcPts val="1000"/>
               </a:spcAft>
+              <a:buSzPct val="100000"/>
               <a:buChar char="•"/>
               <a:lnSpc>
                 <a:spcPts val="2200"/>
@@ -5269,10 +5299,12 @@
           </a:bodyPr>
           <a:lstStyle/>
           <a:p>
-            <a:pPr>
+            <a:pPr lvl="0" marL="457200" indent="-228600">
+              <a:buFont typeface="Calibri"/>
               <a:spcAft>
                 <a:spcPts val="1000"/>
               </a:spcAft>
+              <a:buSzPct val="100000"/>
               <a:buChar char="•"/>
               <a:lnSpc>
                 <a:spcPts val="2200"/>
@@ -5289,10 +5321,12 @@
             </a:r>
           </a:p>
           <a:p>
-            <a:pPr>
+            <a:pPr lvl="0" marL="457200" indent="-228600">
+              <a:buFont typeface="Calibri"/>
               <a:spcAft>
                 <a:spcPts val="1000"/>
               </a:spcAft>
+              <a:buSzPct val="100000"/>
               <a:buChar char="•"/>
               <a:lnSpc>
                 <a:spcPts val="2200"/>
@@ -5309,10 +5343,12 @@
             </a:r>
           </a:p>
           <a:p>
-            <a:pPr>
+            <a:pPr lvl="0" marL="457200" indent="-228600">
+              <a:buFont typeface="Calibri"/>
               <a:spcAft>
                 <a:spcPts val="1000"/>
               </a:spcAft>
+              <a:buSzPct val="100000"/>
               <a:buChar char="•"/>
               <a:lnSpc>
                 <a:spcPts val="2200"/>
@@ -5448,10 +5484,12 @@
           </a:bodyPr>
           <a:lstStyle/>
           <a:p>
-            <a:pPr>
+            <a:pPr lvl="0" marL="457200" indent="-228600">
+              <a:buFont typeface="Calibri"/>
               <a:spcAft>
                 <a:spcPts val="1000"/>
               </a:spcAft>
+              <a:buSzPct val="100000"/>
               <a:buChar char="•"/>
               <a:lnSpc>
                 <a:spcPts val="2200"/>
@@ -5468,10 +5506,12 @@
             </a:r>
           </a:p>
           <a:p>
-            <a:pPr>
+            <a:pPr lvl="0" marL="457200" indent="-228600">
+              <a:buFont typeface="Calibri"/>
               <a:spcAft>
                 <a:spcPts val="1000"/>
               </a:spcAft>
+              <a:buSzPct val="100000"/>
               <a:buChar char="•"/>
               <a:lnSpc>
                 <a:spcPts val="2200"/>
